--- a/Policy Brief Analysis.pptx
+++ b/Policy Brief Analysis.pptx
@@ -113,6 +113,179 @@
 </p:presentation>
 </file>
 
+<file path=ppt/changesInfos/changesInfo1.xml><?xml version="1.0" encoding="utf-8"?>
+<pc:chgInfo xmlns:a="http://schemas.openxmlformats.org/drawingml/2006/main" xmlns:r="http://schemas.openxmlformats.org/officeDocument/2006/relationships" xmlns:ac="http://schemas.microsoft.com/office/drawing/2013/main/command" xmlns:pc="http://schemas.microsoft.com/office/powerpoint/2013/main/command">
+  <pc:docChgLst>
+    <pc:chgData name="Dario Schulz" userId="fd94faa1-b2a3-473c-8bce-88e9296ee7ab" providerId="ADAL" clId="{38999F15-808C-41BA-A97B-B5E401132988}"/>
+    <pc:docChg chg="custSel modSld">
+      <pc:chgData name="Dario Schulz" userId="fd94faa1-b2a3-473c-8bce-88e9296ee7ab" providerId="ADAL" clId="{38999F15-808C-41BA-A97B-B5E401132988}" dt="2026-08-31T09:40:02.820" v="78" actId="1037"/>
+      <pc:docMkLst>
+        <pc:docMk/>
+      </pc:docMkLst>
+      <pc:sldChg chg="addSp delSp modSp mod">
+        <pc:chgData name="Dario Schulz" userId="fd94faa1-b2a3-473c-8bce-88e9296ee7ab" providerId="ADAL" clId="{38999F15-808C-41BA-A97B-B5E401132988}" dt="2026-08-31T09:40:02.820" v="78" actId="1037"/>
+        <pc:sldMkLst>
+          <pc:docMk/>
+          <pc:sldMk cId="3764378937" sldId="257"/>
+        </pc:sldMkLst>
+        <pc:spChg chg="mod">
+          <ac:chgData name="Dario Schulz" userId="fd94faa1-b2a3-473c-8bce-88e9296ee7ab" providerId="ADAL" clId="{38999F15-808C-41BA-A97B-B5E401132988}" dt="2026-08-31T09:40:02.820" v="78" actId="1037"/>
+          <ac:spMkLst>
+            <pc:docMk/>
+            <pc:sldMk cId="3764378937" sldId="257"/>
+            <ac:spMk id="3" creationId="{D2FB0397-6C32-F9E3-5203-2062F6AC96FE}"/>
+          </ac:spMkLst>
+        </pc:spChg>
+        <pc:spChg chg="mod">
+          <ac:chgData name="Dario Schulz" userId="fd94faa1-b2a3-473c-8bce-88e9296ee7ab" providerId="ADAL" clId="{38999F15-808C-41BA-A97B-B5E401132988}" dt="2026-08-31T09:40:02.820" v="78" actId="1037"/>
+          <ac:spMkLst>
+            <pc:docMk/>
+            <pc:sldMk cId="3764378937" sldId="257"/>
+            <ac:spMk id="4" creationId="{764C0444-4478-97AD-37A2-40979D47403A}"/>
+          </ac:spMkLst>
+        </pc:spChg>
+        <pc:spChg chg="mod">
+          <ac:chgData name="Dario Schulz" userId="fd94faa1-b2a3-473c-8bce-88e9296ee7ab" providerId="ADAL" clId="{38999F15-808C-41BA-A97B-B5E401132988}" dt="2026-08-31T09:40:02.820" v="78" actId="1037"/>
+          <ac:spMkLst>
+            <pc:docMk/>
+            <pc:sldMk cId="3764378937" sldId="257"/>
+            <ac:spMk id="5" creationId="{32B74434-3F42-F534-0ED6-9F35B4CE9F16}"/>
+          </ac:spMkLst>
+        </pc:spChg>
+        <pc:spChg chg="mod">
+          <ac:chgData name="Dario Schulz" userId="fd94faa1-b2a3-473c-8bce-88e9296ee7ab" providerId="ADAL" clId="{38999F15-808C-41BA-A97B-B5E401132988}" dt="2026-08-31T09:40:02.820" v="78" actId="1037"/>
+          <ac:spMkLst>
+            <pc:docMk/>
+            <pc:sldMk cId="3764378937" sldId="257"/>
+            <ac:spMk id="6" creationId="{C87CB1D6-0DCD-C4CE-809F-E0C5B9AB210D}"/>
+          </ac:spMkLst>
+        </pc:spChg>
+        <pc:spChg chg="mod">
+          <ac:chgData name="Dario Schulz" userId="fd94faa1-b2a3-473c-8bce-88e9296ee7ab" providerId="ADAL" clId="{38999F15-808C-41BA-A97B-B5E401132988}" dt="2026-08-31T09:38:35.509" v="18" actId="1076"/>
+          <ac:spMkLst>
+            <pc:docMk/>
+            <pc:sldMk cId="3764378937" sldId="257"/>
+            <ac:spMk id="7" creationId="{5AAC446B-2A7B-1B2E-72B0-2394B00276A5}"/>
+          </ac:spMkLst>
+        </pc:spChg>
+        <pc:spChg chg="del">
+          <ac:chgData name="Dario Schulz" userId="fd94faa1-b2a3-473c-8bce-88e9296ee7ab" providerId="ADAL" clId="{38999F15-808C-41BA-A97B-B5E401132988}" dt="2026-08-31T09:37:02.304" v="0" actId="478"/>
+          <ac:spMkLst>
+            <pc:docMk/>
+            <pc:sldMk cId="3764378937" sldId="257"/>
+            <ac:spMk id="9" creationId="{85C3477F-D3D9-E78D-6A80-31C14B8D164F}"/>
+          </ac:spMkLst>
+        </pc:spChg>
+        <pc:spChg chg="del">
+          <ac:chgData name="Dario Schulz" userId="fd94faa1-b2a3-473c-8bce-88e9296ee7ab" providerId="ADAL" clId="{38999F15-808C-41BA-A97B-B5E401132988}" dt="2026-08-31T09:37:03.960" v="1" actId="478"/>
+          <ac:spMkLst>
+            <pc:docMk/>
+            <pc:sldMk cId="3764378937" sldId="257"/>
+            <ac:spMk id="11" creationId="{139D892B-1170-0E25-8A3D-DDB194ACB7E3}"/>
+          </ac:spMkLst>
+        </pc:spChg>
+        <pc:spChg chg="mod">
+          <ac:chgData name="Dario Schulz" userId="fd94faa1-b2a3-473c-8bce-88e9296ee7ab" providerId="ADAL" clId="{38999F15-808C-41BA-A97B-B5E401132988}" dt="2026-08-31T09:40:02.820" v="78" actId="1037"/>
+          <ac:spMkLst>
+            <pc:docMk/>
+            <pc:sldMk cId="3764378937" sldId="257"/>
+            <ac:spMk id="13" creationId="{16866EDE-22A0-16A7-BD33-F6CF2A22BAE2}"/>
+          </ac:spMkLst>
+        </pc:spChg>
+        <pc:spChg chg="mod">
+          <ac:chgData name="Dario Schulz" userId="fd94faa1-b2a3-473c-8bce-88e9296ee7ab" providerId="ADAL" clId="{38999F15-808C-41BA-A97B-B5E401132988}" dt="2026-08-31T09:40:02.820" v="78" actId="1037"/>
+          <ac:spMkLst>
+            <pc:docMk/>
+            <pc:sldMk cId="3764378937" sldId="257"/>
+            <ac:spMk id="21" creationId="{51147699-B1BF-8343-2086-A0C5D44FFA33}"/>
+          </ac:spMkLst>
+        </pc:spChg>
+        <pc:spChg chg="mod">
+          <ac:chgData name="Dario Schulz" userId="fd94faa1-b2a3-473c-8bce-88e9296ee7ab" providerId="ADAL" clId="{38999F15-808C-41BA-A97B-B5E401132988}" dt="2026-08-31T09:40:02.820" v="78" actId="1037"/>
+          <ac:spMkLst>
+            <pc:docMk/>
+            <pc:sldMk cId="3764378937" sldId="257"/>
+            <ac:spMk id="22" creationId="{3FFE7259-4250-71BB-ED00-6C92AFB42CF8}"/>
+          </ac:spMkLst>
+        </pc:spChg>
+        <pc:spChg chg="mod">
+          <ac:chgData name="Dario Schulz" userId="fd94faa1-b2a3-473c-8bce-88e9296ee7ab" providerId="ADAL" clId="{38999F15-808C-41BA-A97B-B5E401132988}" dt="2026-08-31T09:40:02.820" v="78" actId="1037"/>
+          <ac:spMkLst>
+            <pc:docMk/>
+            <pc:sldMk cId="3764378937" sldId="257"/>
+            <ac:spMk id="24" creationId="{B19FC0BE-B681-5C3B-0A91-EFD668852D96}"/>
+          </ac:spMkLst>
+        </pc:spChg>
+        <pc:spChg chg="add mod">
+          <ac:chgData name="Dario Schulz" userId="fd94faa1-b2a3-473c-8bce-88e9296ee7ab" providerId="ADAL" clId="{38999F15-808C-41BA-A97B-B5E401132988}" dt="2026-08-31T09:38:14.328" v="15" actId="14100"/>
+          <ac:spMkLst>
+            <pc:docMk/>
+            <pc:sldMk cId="3764378937" sldId="257"/>
+            <ac:spMk id="36" creationId="{C895BB0F-1416-1F02-D352-EB1309B98E33}"/>
+          </ac:spMkLst>
+        </pc:spChg>
+        <pc:spChg chg="mod">
+          <ac:chgData name="Dario Schulz" userId="fd94faa1-b2a3-473c-8bce-88e9296ee7ab" providerId="ADAL" clId="{38999F15-808C-41BA-A97B-B5E401132988}" dt="2026-08-31T09:40:02.820" v="78" actId="1037"/>
+          <ac:spMkLst>
+            <pc:docMk/>
+            <pc:sldMk cId="3764378937" sldId="257"/>
+            <ac:spMk id="50" creationId="{6E33C544-ED6A-5B7F-0104-1BD80691450E}"/>
+          </ac:spMkLst>
+        </pc:spChg>
+        <pc:spChg chg="mod">
+          <ac:chgData name="Dario Schulz" userId="fd94faa1-b2a3-473c-8bce-88e9296ee7ab" providerId="ADAL" clId="{38999F15-808C-41BA-A97B-B5E401132988}" dt="2026-08-31T09:40:02.820" v="78" actId="1037"/>
+          <ac:spMkLst>
+            <pc:docMk/>
+            <pc:sldMk cId="3764378937" sldId="257"/>
+            <ac:spMk id="55" creationId="{55BEC65F-53E5-C27B-2923-CCEDA46ACDBA}"/>
+          </ac:spMkLst>
+        </pc:spChg>
+        <pc:cxnChg chg="mod">
+          <ac:chgData name="Dario Schulz" userId="fd94faa1-b2a3-473c-8bce-88e9296ee7ab" providerId="ADAL" clId="{38999F15-808C-41BA-A97B-B5E401132988}" dt="2026-08-31T09:37:58.843" v="12" actId="1076"/>
+          <ac:cxnSpMkLst>
+            <pc:docMk/>
+            <pc:sldMk cId="3764378937" sldId="257"/>
+            <ac:cxnSpMk id="14" creationId="{31E0515F-DB53-B36E-8254-36C0E61031FA}"/>
+          </ac:cxnSpMkLst>
+        </pc:cxnChg>
+        <pc:cxnChg chg="mod">
+          <ac:chgData name="Dario Schulz" userId="fd94faa1-b2a3-473c-8bce-88e9296ee7ab" providerId="ADAL" clId="{38999F15-808C-41BA-A97B-B5E401132988}" dt="2026-08-31T09:38:35.509" v="18" actId="1076"/>
+          <ac:cxnSpMkLst>
+            <pc:docMk/>
+            <pc:sldMk cId="3764378937" sldId="257"/>
+            <ac:cxnSpMk id="30" creationId="{C3558C97-6D48-CCCC-21C6-40C99A7378DD}"/>
+          </ac:cxnSpMkLst>
+        </pc:cxnChg>
+        <pc:cxnChg chg="mod">
+          <ac:chgData name="Dario Schulz" userId="fd94faa1-b2a3-473c-8bce-88e9296ee7ab" providerId="ADAL" clId="{38999F15-808C-41BA-A97B-B5E401132988}" dt="2026-08-31T09:38:14.328" v="15" actId="14100"/>
+          <ac:cxnSpMkLst>
+            <pc:docMk/>
+            <pc:sldMk cId="3764378937" sldId="257"/>
+            <ac:cxnSpMk id="56" creationId="{41474C75-A637-C070-ECB8-C410FE329DAA}"/>
+          </ac:cxnSpMkLst>
+        </pc:cxnChg>
+        <pc:cxnChg chg="mod">
+          <ac:chgData name="Dario Schulz" userId="fd94faa1-b2a3-473c-8bce-88e9296ee7ab" providerId="ADAL" clId="{38999F15-808C-41BA-A97B-B5E401132988}" dt="2026-08-31T09:39:01.238" v="22" actId="1076"/>
+          <ac:cxnSpMkLst>
+            <pc:docMk/>
+            <pc:sldMk cId="3764378937" sldId="257"/>
+            <ac:cxnSpMk id="62" creationId="{53BCD683-AC0D-1FBD-2E54-288B1FDCF65F}"/>
+          </ac:cxnSpMkLst>
+        </pc:cxnChg>
+        <pc:cxnChg chg="mod">
+          <ac:chgData name="Dario Schulz" userId="fd94faa1-b2a3-473c-8bce-88e9296ee7ab" providerId="ADAL" clId="{38999F15-808C-41BA-A97B-B5E401132988}" dt="2026-08-31T09:39:01.238" v="22" actId="1076"/>
+          <ac:cxnSpMkLst>
+            <pc:docMk/>
+            <pc:sldMk cId="3764378937" sldId="257"/>
+            <ac:cxnSpMk id="75" creationId="{232400F9-8540-3D21-52C7-513495D53E8D}"/>
+          </ac:cxnSpMkLst>
+        </pc:cxnChg>
+      </pc:sldChg>
+    </pc:docChg>
+  </pc:docChgLst>
+</pc:chgInfo>
+</file>
+
 <file path=ppt/slideLayouts/slideLayout1.xml><?xml version="1.0" encoding="utf-8"?>
 <p:sldLayout xmlns:a="http://schemas.openxmlformats.org/drawingml/2006/main" xmlns:r="http://schemas.openxmlformats.org/officeDocument/2006/relationships" xmlns:p="http://schemas.openxmlformats.org/presentationml/2006/main" type="title" preserve="1">
   <p:cSld name="Titelfolie">
@@ -262,7 +435,7 @@
           <a:p>
             <a:fld id="{64746AAC-F470-4415-960A-B95932AA5E93}" type="datetimeFigureOut">
               <a:rPr lang="LID4096" smtClean="0"/>
-              <a:t>05/08/2026</a:t>
+              <a:t>08/31/2026</a:t>
             </a:fld>
             <a:endParaRPr lang="LID4096"/>
           </a:p>
@@ -316,7 +489,7 @@
           <a:p>
             <a:fld id="{1F486FFA-B8E9-4AA2-91A6-7307C2295D2B}" type="slidenum">
               <a:rPr lang="LID4096" smtClean="0"/>
-              <a:t>‹Nr.›</a:t>
+              <a:t>‹#›</a:t>
             </a:fld>
             <a:endParaRPr lang="LID4096"/>
           </a:p>
@@ -462,7 +635,7 @@
           <a:p>
             <a:fld id="{64746AAC-F470-4415-960A-B95932AA5E93}" type="datetimeFigureOut">
               <a:rPr lang="LID4096" smtClean="0"/>
-              <a:t>05/08/2026</a:t>
+              <a:t>08/31/2026</a:t>
             </a:fld>
             <a:endParaRPr lang="LID4096"/>
           </a:p>
@@ -516,7 +689,7 @@
           <a:p>
             <a:fld id="{1F486FFA-B8E9-4AA2-91A6-7307C2295D2B}" type="slidenum">
               <a:rPr lang="LID4096" smtClean="0"/>
-              <a:t>‹Nr.›</a:t>
+              <a:t>‹#›</a:t>
             </a:fld>
             <a:endParaRPr lang="LID4096"/>
           </a:p>
@@ -672,7 +845,7 @@
           <a:p>
             <a:fld id="{64746AAC-F470-4415-960A-B95932AA5E93}" type="datetimeFigureOut">
               <a:rPr lang="LID4096" smtClean="0"/>
-              <a:t>05/08/2026</a:t>
+              <a:t>08/31/2026</a:t>
             </a:fld>
             <a:endParaRPr lang="LID4096"/>
           </a:p>
@@ -726,7 +899,7 @@
           <a:p>
             <a:fld id="{1F486FFA-B8E9-4AA2-91A6-7307C2295D2B}" type="slidenum">
               <a:rPr lang="LID4096" smtClean="0"/>
-              <a:t>‹Nr.›</a:t>
+              <a:t>‹#›</a:t>
             </a:fld>
             <a:endParaRPr lang="LID4096"/>
           </a:p>
@@ -872,7 +1045,7 @@
           <a:p>
             <a:fld id="{64746AAC-F470-4415-960A-B95932AA5E93}" type="datetimeFigureOut">
               <a:rPr lang="LID4096" smtClean="0"/>
-              <a:t>05/08/2026</a:t>
+              <a:t>08/31/2026</a:t>
             </a:fld>
             <a:endParaRPr lang="LID4096"/>
           </a:p>
@@ -926,7 +1099,7 @@
           <a:p>
             <a:fld id="{1F486FFA-B8E9-4AA2-91A6-7307C2295D2B}" type="slidenum">
               <a:rPr lang="LID4096" smtClean="0"/>
-              <a:t>‹Nr.›</a:t>
+              <a:t>‹#›</a:t>
             </a:fld>
             <a:endParaRPr lang="LID4096"/>
           </a:p>
@@ -1148,7 +1321,7 @@
           <a:p>
             <a:fld id="{64746AAC-F470-4415-960A-B95932AA5E93}" type="datetimeFigureOut">
               <a:rPr lang="LID4096" smtClean="0"/>
-              <a:t>05/08/2026</a:t>
+              <a:t>08/31/2026</a:t>
             </a:fld>
             <a:endParaRPr lang="LID4096"/>
           </a:p>
@@ -1202,7 +1375,7 @@
           <a:p>
             <a:fld id="{1F486FFA-B8E9-4AA2-91A6-7307C2295D2B}" type="slidenum">
               <a:rPr lang="LID4096" smtClean="0"/>
-              <a:t>‹Nr.›</a:t>
+              <a:t>‹#›</a:t>
             </a:fld>
             <a:endParaRPr lang="LID4096"/>
           </a:p>
@@ -1416,7 +1589,7 @@
           <a:p>
             <a:fld id="{64746AAC-F470-4415-960A-B95932AA5E93}" type="datetimeFigureOut">
               <a:rPr lang="LID4096" smtClean="0"/>
-              <a:t>05/08/2026</a:t>
+              <a:t>08/31/2026</a:t>
             </a:fld>
             <a:endParaRPr lang="LID4096"/>
           </a:p>
@@ -1470,7 +1643,7 @@
           <a:p>
             <a:fld id="{1F486FFA-B8E9-4AA2-91A6-7307C2295D2B}" type="slidenum">
               <a:rPr lang="LID4096" smtClean="0"/>
-              <a:t>‹Nr.›</a:t>
+              <a:t>‹#›</a:t>
             </a:fld>
             <a:endParaRPr lang="LID4096"/>
           </a:p>
@@ -1831,7 +2004,7 @@
           <a:p>
             <a:fld id="{64746AAC-F470-4415-960A-B95932AA5E93}" type="datetimeFigureOut">
               <a:rPr lang="LID4096" smtClean="0"/>
-              <a:t>05/08/2026</a:t>
+              <a:t>08/31/2026</a:t>
             </a:fld>
             <a:endParaRPr lang="LID4096"/>
           </a:p>
@@ -1885,7 +2058,7 @@
           <a:p>
             <a:fld id="{1F486FFA-B8E9-4AA2-91A6-7307C2295D2B}" type="slidenum">
               <a:rPr lang="LID4096" smtClean="0"/>
-              <a:t>‹Nr.›</a:t>
+              <a:t>‹#›</a:t>
             </a:fld>
             <a:endParaRPr lang="LID4096"/>
           </a:p>
@@ -1973,7 +2146,7 @@
           <a:p>
             <a:fld id="{64746AAC-F470-4415-960A-B95932AA5E93}" type="datetimeFigureOut">
               <a:rPr lang="LID4096" smtClean="0"/>
-              <a:t>05/08/2026</a:t>
+              <a:t>08/31/2026</a:t>
             </a:fld>
             <a:endParaRPr lang="LID4096"/>
           </a:p>
@@ -2027,7 +2200,7 @@
           <a:p>
             <a:fld id="{1F486FFA-B8E9-4AA2-91A6-7307C2295D2B}" type="slidenum">
               <a:rPr lang="LID4096" smtClean="0"/>
-              <a:t>‹Nr.›</a:t>
+              <a:t>‹#›</a:t>
             </a:fld>
             <a:endParaRPr lang="LID4096"/>
           </a:p>
@@ -2086,7 +2259,7 @@
           <a:p>
             <a:fld id="{64746AAC-F470-4415-960A-B95932AA5E93}" type="datetimeFigureOut">
               <a:rPr lang="LID4096" smtClean="0"/>
-              <a:t>05/08/2026</a:t>
+              <a:t>08/31/2026</a:t>
             </a:fld>
             <a:endParaRPr lang="LID4096"/>
           </a:p>
@@ -2140,7 +2313,7 @@
           <a:p>
             <a:fld id="{1F486FFA-B8E9-4AA2-91A6-7307C2295D2B}" type="slidenum">
               <a:rPr lang="LID4096" smtClean="0"/>
-              <a:t>‹Nr.›</a:t>
+              <a:t>‹#›</a:t>
             </a:fld>
             <a:endParaRPr lang="LID4096"/>
           </a:p>
@@ -2399,7 +2572,7 @@
           <a:p>
             <a:fld id="{64746AAC-F470-4415-960A-B95932AA5E93}" type="datetimeFigureOut">
               <a:rPr lang="LID4096" smtClean="0"/>
-              <a:t>05/08/2026</a:t>
+              <a:t>08/31/2026</a:t>
             </a:fld>
             <a:endParaRPr lang="LID4096"/>
           </a:p>
@@ -2453,7 +2626,7 @@
           <a:p>
             <a:fld id="{1F486FFA-B8E9-4AA2-91A6-7307C2295D2B}" type="slidenum">
               <a:rPr lang="LID4096" smtClean="0"/>
-              <a:t>‹Nr.›</a:t>
+              <a:t>‹#›</a:t>
             </a:fld>
             <a:endParaRPr lang="LID4096"/>
           </a:p>
@@ -2688,7 +2861,7 @@
           <a:p>
             <a:fld id="{64746AAC-F470-4415-960A-B95932AA5E93}" type="datetimeFigureOut">
               <a:rPr lang="LID4096" smtClean="0"/>
-              <a:t>05/08/2026</a:t>
+              <a:t>08/31/2026</a:t>
             </a:fld>
             <a:endParaRPr lang="LID4096"/>
           </a:p>
@@ -2742,7 +2915,7 @@
           <a:p>
             <a:fld id="{1F486FFA-B8E9-4AA2-91A6-7307C2295D2B}" type="slidenum">
               <a:rPr lang="LID4096" smtClean="0"/>
-              <a:t>‹Nr.›</a:t>
+              <a:t>‹#›</a:t>
             </a:fld>
             <a:endParaRPr lang="LID4096"/>
           </a:p>
@@ -2931,7 +3104,7 @@
           <a:p>
             <a:fld id="{64746AAC-F470-4415-960A-B95932AA5E93}" type="datetimeFigureOut">
               <a:rPr lang="LID4096" smtClean="0"/>
-              <a:t>05/08/2026</a:t>
+              <a:t>08/31/2026</a:t>
             </a:fld>
             <a:endParaRPr lang="LID4096"/>
           </a:p>
@@ -3021,7 +3194,7 @@
           <a:p>
             <a:fld id="{1F486FFA-B8E9-4AA2-91A6-7307C2295D2B}" type="slidenum">
               <a:rPr lang="LID4096" smtClean="0"/>
-              <a:t>‹Nr.›</a:t>
+              <a:t>‹#›</a:t>
             </a:fld>
             <a:endParaRPr lang="LID4096"/>
           </a:p>
@@ -3456,7 +3629,7 @@
         </p:nvSpPr>
         <p:spPr>
           <a:xfrm>
-            <a:off x="919118" y="1234440"/>
+            <a:off x="742142" y="477355"/>
             <a:ext cx="1399032" cy="731520"/>
           </a:xfrm>
           <a:prstGeom prst="flowChartMagneticDisk">
@@ -3504,7 +3677,7 @@
         </p:nvSpPr>
         <p:spPr>
           <a:xfrm>
-            <a:off x="521208" y="2330196"/>
+            <a:off x="344232" y="1573111"/>
             <a:ext cx="1929384" cy="1353312"/>
           </a:xfrm>
           <a:prstGeom prst="flowChartMultidocument">
@@ -3580,7 +3753,7 @@
         </p:nvSpPr>
         <p:spPr>
           <a:xfrm>
-            <a:off x="2916936" y="1362456"/>
+            <a:off x="2739960" y="605371"/>
             <a:ext cx="1261872" cy="950976"/>
           </a:xfrm>
           <a:prstGeom prst="rect">
@@ -3628,7 +3801,7 @@
         </p:nvSpPr>
         <p:spPr>
           <a:xfrm>
-            <a:off x="4663440" y="1362456"/>
+            <a:off x="4486464" y="605371"/>
             <a:ext cx="1261872" cy="603504"/>
           </a:xfrm>
           <a:prstGeom prst="rect">
@@ -3676,7 +3849,7 @@
         </p:nvSpPr>
         <p:spPr>
           <a:xfrm>
-            <a:off x="4663440" y="2154936"/>
+            <a:off x="4486464" y="1397851"/>
             <a:ext cx="1261872" cy="603504"/>
           </a:xfrm>
           <a:prstGeom prst="rect">
@@ -3724,7 +3897,7 @@
         </p:nvSpPr>
         <p:spPr>
           <a:xfrm>
-            <a:off x="7534656" y="4608576"/>
+            <a:off x="6109327" y="4218173"/>
             <a:ext cx="1261872" cy="603504"/>
           </a:xfrm>
           <a:prstGeom prst="rect">
@@ -3772,7 +3945,7 @@
         </p:nvSpPr>
         <p:spPr>
           <a:xfrm>
-            <a:off x="4663440" y="2947416"/>
+            <a:off x="4486464" y="2190331"/>
             <a:ext cx="1261872" cy="603504"/>
           </a:xfrm>
           <a:prstGeom prst="rect">
@@ -3824,7 +3997,7 @@
         </p:nvCxnSpPr>
         <p:spPr>
           <a:xfrm>
-            <a:off x="1618634" y="1965960"/>
+            <a:off x="1441658" y="1208875"/>
             <a:ext cx="0" cy="364236"/>
           </a:xfrm>
           <a:prstGeom prst="straightConnector1">
@@ -3867,8 +4040,8 @@
         </p:nvCxnSpPr>
         <p:spPr>
           <a:xfrm>
-            <a:off x="2450592" y="3006852"/>
-            <a:ext cx="466344" cy="1121664"/>
+            <a:off x="2273616" y="2249767"/>
+            <a:ext cx="466344" cy="1221486"/>
           </a:xfrm>
           <a:prstGeom prst="bentConnector3">
             <a:avLst/>
@@ -3909,7 +4082,7 @@
         </p:nvCxnSpPr>
         <p:spPr>
           <a:xfrm>
-            <a:off x="4178808" y="1837944"/>
+            <a:off x="4001832" y="1080859"/>
             <a:ext cx="484632" cy="1411224"/>
           </a:xfrm>
           <a:prstGeom prst="bentConnector3">
@@ -3951,7 +4124,7 @@
         </p:nvCxnSpPr>
         <p:spPr>
           <a:xfrm>
-            <a:off x="4178808" y="1837944"/>
+            <a:off x="4001832" y="1080859"/>
             <a:ext cx="484632" cy="618744"/>
           </a:xfrm>
           <a:prstGeom prst="bentConnector3">
@@ -3993,7 +4166,7 @@
         </p:nvCxnSpPr>
         <p:spPr>
           <a:xfrm flipV="1">
-            <a:off x="4178808" y="1664208"/>
+            <a:off x="4001832" y="907123"/>
             <a:ext cx="484632" cy="173736"/>
           </a:xfrm>
           <a:prstGeom prst="bentConnector3">
@@ -4032,7 +4205,7 @@
         </p:nvSpPr>
         <p:spPr>
           <a:xfrm>
-            <a:off x="6391656" y="1362456"/>
+            <a:off x="6214680" y="605371"/>
             <a:ext cx="3511296" cy="603504"/>
           </a:xfrm>
           <a:prstGeom prst="rect">
@@ -4084,8 +4257,8 @@
         </p:nvSpPr>
         <p:spPr>
           <a:xfrm>
-            <a:off x="6409944" y="5416294"/>
-            <a:ext cx="3511296" cy="1130809"/>
+            <a:off x="3736263" y="5093112"/>
+            <a:ext cx="6008001" cy="696906"/>
           </a:xfrm>
           <a:prstGeom prst="rect">
             <a:avLst/>
@@ -4136,7 +4309,7 @@
         </p:nvSpPr>
         <p:spPr>
           <a:xfrm>
-            <a:off x="6391656" y="2154936"/>
+            <a:off x="6214680" y="1397851"/>
             <a:ext cx="3511296" cy="603504"/>
           </a:xfrm>
           <a:prstGeom prst="rect">
@@ -4188,7 +4361,7 @@
         </p:nvSpPr>
         <p:spPr>
           <a:xfrm>
-            <a:off x="6409944" y="2947416"/>
+            <a:off x="6232968" y="2190331"/>
             <a:ext cx="3511296" cy="603504"/>
           </a:xfrm>
           <a:prstGeom prst="rect">
@@ -4243,7 +4416,7 @@
         </p:nvCxnSpPr>
         <p:spPr>
           <a:xfrm>
-            <a:off x="5925312" y="1664208"/>
+            <a:off x="5748336" y="907123"/>
             <a:ext cx="466344" cy="0"/>
           </a:xfrm>
           <a:prstGeom prst="straightConnector1">
@@ -4286,8 +4459,8 @@
         </p:nvCxnSpPr>
         <p:spPr>
           <a:xfrm>
-            <a:off x="8165592" y="5212080"/>
-            <a:ext cx="0" cy="204214"/>
+            <a:off x="6740263" y="4821677"/>
+            <a:ext cx="1" cy="271435"/>
           </a:xfrm>
           <a:prstGeom prst="straightConnector1">
             <a:avLst/>
@@ -4329,7 +4502,7 @@
         </p:nvCxnSpPr>
         <p:spPr>
           <a:xfrm>
-            <a:off x="5925312" y="3249168"/>
+            <a:off x="5748336" y="2492083"/>
             <a:ext cx="484632" cy="0"/>
           </a:xfrm>
           <a:prstGeom prst="straightConnector1">
@@ -4372,7 +4545,7 @@
         </p:nvCxnSpPr>
         <p:spPr>
           <a:xfrm>
-            <a:off x="5925312" y="2456688"/>
+            <a:off x="5748336" y="1699603"/>
             <a:ext cx="466344" cy="0"/>
           </a:xfrm>
           <a:prstGeom prst="straightConnector1">
@@ -4415,7 +4588,7 @@
         </p:nvCxnSpPr>
         <p:spPr>
           <a:xfrm flipV="1">
-            <a:off x="2450592" y="1837944"/>
+            <a:off x="2273616" y="1080859"/>
             <a:ext cx="466344" cy="1168908"/>
           </a:xfrm>
           <a:prstGeom prst="bentConnector3">
@@ -4454,7 +4627,7 @@
         </p:nvSpPr>
         <p:spPr>
           <a:xfrm>
-            <a:off x="2916936" y="3653028"/>
+            <a:off x="2739960" y="2995765"/>
             <a:ext cx="1261872" cy="950976"/>
           </a:xfrm>
           <a:prstGeom prst="rect">
@@ -4502,8 +4675,8 @@
         </p:nvSpPr>
         <p:spPr>
           <a:xfrm>
-            <a:off x="6409944" y="3820668"/>
-            <a:ext cx="3511296" cy="603504"/>
+            <a:off x="6920882" y="2995764"/>
+            <a:ext cx="2135468" cy="950974"/>
           </a:xfrm>
           <a:prstGeom prst="rect">
             <a:avLst/>
@@ -4548,14 +4721,14 @@
           <p:cNvCxnSpPr>
             <a:cxnSpLocks/>
             <a:stCxn id="50" idx="3"/>
-            <a:endCxn id="55" idx="1"/>
+            <a:endCxn id="36" idx="1"/>
           </p:cNvCxnSpPr>
           <p:nvPr/>
         </p:nvCxnSpPr>
         <p:spPr>
           <a:xfrm flipV="1">
-            <a:off x="4178808" y="4122420"/>
-            <a:ext cx="2231136" cy="6096"/>
+            <a:off x="4001832" y="3471252"/>
+            <a:ext cx="462265" cy="1"/>
           </a:xfrm>
           <a:prstGeom prst="straightConnector1">
             <a:avLst/>
@@ -4597,8 +4770,8 @@
         </p:nvCxnSpPr>
         <p:spPr>
           <a:xfrm>
-            <a:off x="8165592" y="3550920"/>
-            <a:ext cx="0" cy="269748"/>
+            <a:off x="7988616" y="2793835"/>
+            <a:ext cx="0" cy="201929"/>
           </a:xfrm>
           <a:prstGeom prst="straightConnector1">
             <a:avLst/>
@@ -4639,9 +4812,9 @@
           <p:nvPr/>
         </p:nvCxnSpPr>
         <p:spPr>
-          <a:xfrm>
-            <a:off x="8165592" y="4424172"/>
-            <a:ext cx="0" cy="184404"/>
+          <a:xfrm flipH="1">
+            <a:off x="6740263" y="3946738"/>
+            <a:ext cx="1248353" cy="271435"/>
           </a:xfrm>
           <a:prstGeom prst="straightConnector1">
             <a:avLst/>
@@ -4667,10 +4840,10 @@
       </p:cxnSp>
       <p:sp>
         <p:nvSpPr>
-          <p:cNvPr id="9" name="Ellipse 8">
-            <a:extLst>
-              <a:ext uri="{FF2B5EF4-FFF2-40B4-BE49-F238E27FC236}">
-                <a16:creationId xmlns:a16="http://schemas.microsoft.com/office/drawing/2014/main" id="{85C3477F-D3D9-E78D-6A80-31C14B8D164F}"/>
+          <p:cNvPr id="12" name="Legende: Linie 11">
+            <a:extLst>
+              <a:ext uri="{FF2B5EF4-FFF2-40B4-BE49-F238E27FC236}">
+                <a16:creationId xmlns:a16="http://schemas.microsoft.com/office/drawing/2014/main" id="{1955D5A9-9747-931B-0453-576C596AB745}"/>
               </a:ext>
             </a:extLst>
           </p:cNvPr>
@@ -4679,115 +4852,7 @@
         </p:nvSpPr>
         <p:spPr>
           <a:xfrm>
-            <a:off x="7882128" y="3456432"/>
-            <a:ext cx="566928" cy="454152"/>
-          </a:xfrm>
-          <a:prstGeom prst="ellipse">
-            <a:avLst/>
-          </a:prstGeom>
-          <a:noFill/>
-          <a:ln w="57150" cap="flat" cmpd="sng" algn="ctr">
-            <a:solidFill>
-              <a:schemeClr val="accent2"/>
-            </a:solidFill>
-            <a:prstDash val="solid"/>
-            <a:round/>
-            <a:headEnd type="none" w="med" len="med"/>
-            <a:tailEnd type="none" w="med" len="med"/>
-          </a:ln>
-        </p:spPr>
-        <p:style>
-          <a:lnRef idx="0">
-            <a:scrgbClr r="0" g="0" b="0"/>
-          </a:lnRef>
-          <a:fillRef idx="0">
-            <a:scrgbClr r="0" g="0" b="0"/>
-          </a:fillRef>
-          <a:effectRef idx="0">
-            <a:scrgbClr r="0" g="0" b="0"/>
-          </a:effectRef>
-          <a:fontRef idx="minor">
-            <a:schemeClr val="accent2"/>
-          </a:fontRef>
-        </p:style>
-        <p:txBody>
-          <a:bodyPr rtlCol="0" anchor="ctr"/>
-          <a:lstStyle/>
-          <a:p>
-            <a:pPr algn="ctr"/>
-            <a:endParaRPr lang="LID4096"/>
-          </a:p>
-        </p:txBody>
-      </p:sp>
-      <p:sp>
-        <p:nvSpPr>
-          <p:cNvPr id="11" name="Ellipse 10">
-            <a:extLst>
-              <a:ext uri="{FF2B5EF4-FFF2-40B4-BE49-F238E27FC236}">
-                <a16:creationId xmlns:a16="http://schemas.microsoft.com/office/drawing/2014/main" id="{139D892B-1170-0E25-8A3D-DDB194ACB7E3}"/>
-              </a:ext>
-            </a:extLst>
-          </p:cNvPr>
-          <p:cNvSpPr/>
-          <p:nvPr/>
-        </p:nvSpPr>
-        <p:spPr>
-          <a:xfrm>
-            <a:off x="7947661" y="4372356"/>
-            <a:ext cx="435862" cy="307847"/>
-          </a:xfrm>
-          <a:prstGeom prst="ellipse">
-            <a:avLst/>
-          </a:prstGeom>
-          <a:noFill/>
-          <a:ln w="57150" cap="flat" cmpd="sng" algn="ctr">
-            <a:solidFill>
-              <a:schemeClr val="accent2"/>
-            </a:solidFill>
-            <a:prstDash val="solid"/>
-            <a:round/>
-            <a:headEnd type="none" w="med" len="med"/>
-            <a:tailEnd type="none" w="med" len="med"/>
-          </a:ln>
-        </p:spPr>
-        <p:style>
-          <a:lnRef idx="0">
-            <a:scrgbClr r="0" g="0" b="0"/>
-          </a:lnRef>
-          <a:fillRef idx="0">
-            <a:scrgbClr r="0" g="0" b="0"/>
-          </a:fillRef>
-          <a:effectRef idx="0">
-            <a:scrgbClr r="0" g="0" b="0"/>
-          </a:effectRef>
-          <a:fontRef idx="minor">
-            <a:schemeClr val="accent2"/>
-          </a:fontRef>
-        </p:style>
-        <p:txBody>
-          <a:bodyPr rtlCol="0" anchor="ctr"/>
-          <a:lstStyle/>
-          <a:p>
-            <a:pPr algn="ctr"/>
-            <a:endParaRPr lang="LID4096"/>
-          </a:p>
-        </p:txBody>
-      </p:sp>
-      <p:sp>
-        <p:nvSpPr>
-          <p:cNvPr id="12" name="Legende: Linie 11">
-            <a:extLst>
-              <a:ext uri="{FF2B5EF4-FFF2-40B4-BE49-F238E27FC236}">
-                <a16:creationId xmlns:a16="http://schemas.microsoft.com/office/drawing/2014/main" id="{1955D5A9-9747-931B-0453-576C596AB745}"/>
-              </a:ext>
-            </a:extLst>
-          </p:cNvPr>
-          <p:cNvSpPr/>
-          <p:nvPr/>
-        </p:nvSpPr>
-        <p:spPr>
-          <a:xfrm>
-            <a:off x="10186416" y="1334262"/>
+            <a:off x="10009440" y="577177"/>
             <a:ext cx="1883664" cy="2418588"/>
           </a:xfrm>
           <a:prstGeom prst="borderCallout1">
@@ -4858,7 +4923,7 @@
         </p:nvSpPr>
         <p:spPr>
           <a:xfrm>
-            <a:off x="10186416" y="4002786"/>
+            <a:off x="10009440" y="3245701"/>
             <a:ext cx="1883664" cy="2418588"/>
           </a:xfrm>
           <a:prstGeom prst="borderCallout1">
@@ -4910,6 +4975,54 @@
             <a:r>
               <a:rPr lang="en-US" dirty="0"/>
               <a:t> are sometimes very short, but things like implementation details could still be in the wider document.</a:t>
+            </a:r>
+            <a:endParaRPr lang="LID4096" dirty="0"/>
+          </a:p>
+        </p:txBody>
+      </p:sp>
+      <p:sp>
+        <p:nvSpPr>
+          <p:cNvPr id="36" name="Rechteck 54">
+            <a:extLst>
+              <a:ext uri="{FF2B5EF4-FFF2-40B4-BE49-F238E27FC236}">
+                <a16:creationId xmlns:a16="http://schemas.microsoft.com/office/drawing/2014/main" id="{C895BB0F-1416-1F02-D352-EB1309B98E33}"/>
+              </a:ext>
+            </a:extLst>
+          </p:cNvPr>
+          <p:cNvSpPr/>
+          <p:nvPr/>
+        </p:nvSpPr>
+        <p:spPr>
+          <a:xfrm>
+            <a:off x="4464097" y="2995764"/>
+            <a:ext cx="2064527" cy="950975"/>
+          </a:xfrm>
+          <a:prstGeom prst="rect">
+            <a:avLst/>
+          </a:prstGeom>
+        </p:spPr>
+        <p:style>
+          <a:lnRef idx="2">
+            <a:schemeClr val="dk1"/>
+          </a:lnRef>
+          <a:fillRef idx="1">
+            <a:schemeClr val="lt1"/>
+          </a:fillRef>
+          <a:effectRef idx="0">
+            <a:schemeClr val="dk1"/>
+          </a:effectRef>
+          <a:fontRef idx="minor">
+            <a:schemeClr val="dk1"/>
+          </a:fontRef>
+        </p:style>
+        <p:txBody>
+          <a:bodyPr rtlCol="0" anchor="ctr"/>
+          <a:lstStyle/>
+          <a:p>
+            <a:pPr algn="ctr"/>
+            <a:r>
+              <a:rPr lang="en-US" dirty="0"/>
+              <a:t>Corpus with policy recommendations (n = 1333)</a:t>
             </a:r>
             <a:endParaRPr lang="LID4096" dirty="0"/>
           </a:p>
